--- a/PPTs/Ch3_ARM_ISA Exercises.pptx
+++ b/PPTs/Ch3_ARM_ISA Exercises.pptx
@@ -4602,7 +4602,7 @@
           <a:p>
             <a:r>
               <a:rPr lang="en-US" dirty="0"/>
-              <a:t>Spring 2026</a:t>
+              <a:t>Fall 2026</a:t>
             </a:r>
           </a:p>
         </p:txBody>
@@ -9461,7 +9461,7 @@
                 </a:solidFill>
                 <a:latin typeface="Gill Sans MT"/>
               </a:rPr>
-              <a:t>What are the memory address of these four words?</a:t>
+              <a:t>What are the memory addresses of these four words?</a:t>
             </a:r>
           </a:p>
         </p:txBody>
